--- a/updates/GNN update_USC_082526.pptx
+++ b/updates/GNN update_USC_082526.pptx
@@ -5285,6 +5285,17 @@
           <a:p>
             <a:pPr marL="0" indent="0" eaLnBrk="1" hangingPunct="1"/>
             <a:r>
+              <a:rPr lang="en-GB" sz="2000" b="1" dirty="0">
+                <a:solidFill>
+                  <a:srgbClr val="2E2C28"/>
+                </a:solidFill>
+                <a:latin typeface="Garamond" panose="02020404030301010803" pitchFamily="18" charset="0"/>
+                <a:ea typeface="ＭＳ Ｐゴシック" panose="020B0600070205080204" pitchFamily="34" charset="-128"/>
+                <a:cs typeface="Arial" panose="020B0604020202020204" pitchFamily="34" charset="0"/>
+              </a:rPr>
+              <a:t>Aug.</a:t>
+            </a:r>
+            <a:r>
               <a:rPr lang="en-GB" sz="2000" b="1" noProof="0" dirty="0">
                 <a:solidFill>
                   <a:srgbClr val="2E2C28"/>
@@ -5293,7 +5304,7 @@
                 <a:ea typeface="ＭＳ Ｐゴシック" panose="020B0600070205080204" pitchFamily="34" charset="-128"/>
                 <a:cs typeface="Arial" panose="020B0604020202020204" pitchFamily="34" charset="0"/>
               </a:rPr>
-              <a:t>July 22, 2026</a:t>
+              <a:t> 24, 2026</a:t>
             </a:r>
           </a:p>
         </p:txBody>
@@ -8809,8 +8820,8 @@
           </a:fontRef>
         </p:style>
       </p:cxnSp>
-      <mc:AlternateContent xmlns:mc="http://schemas.openxmlformats.org/markup-compatibility/2006">
-        <mc:Choice xmlns:a14="http://schemas.microsoft.com/office/drawing/2010/main" Requires="a14">
+      <mc:AlternateContent xmlns:mc="http://schemas.openxmlformats.org/markup-compatibility/2006" xmlns:a14="http://schemas.microsoft.com/office/drawing/2010/main">
+        <mc:Choice Requires="a14">
           <p:sp>
             <p:nvSpPr>
               <p:cNvPr id="14" name="Rectangle 13">
@@ -8911,16 +8922,7 @@
                           </a:solidFill>
                           <a:latin typeface="Cambria Math" panose="02040503050406030204" pitchFamily="18" charset="0"/>
                         </a:rPr>
-                        <m:t>=0</m:t>
-                      </m:r>
-                      <m:r>
-                        <a:rPr lang="en-US" sz="1000" b="1" i="1" smtClean="0">
-                          <a:solidFill>
-                            <a:schemeClr val="tx1"/>
-                          </a:solidFill>
-                          <a:latin typeface="Cambria Math" panose="02040503050406030204" pitchFamily="18" charset="0"/>
-                        </a:rPr>
-                        <m:t>.482</m:t>
+                        <m:t>=0.482</m:t>
                       </m:r>
                     </m:oMath>
                   </m:oMathPara>
@@ -8930,7 +8932,7 @@
             </p:txBody>
           </p:sp>
         </mc:Choice>
-        <mc:Fallback>
+        <mc:Fallback xmlns="">
           <p:sp>
             <p:nvSpPr>
               <p:cNvPr id="14" name="Rectangle 13">
@@ -8975,8 +8977,8 @@
           </p:sp>
         </mc:Fallback>
       </mc:AlternateContent>
-      <mc:AlternateContent xmlns:mc="http://schemas.openxmlformats.org/markup-compatibility/2006">
-        <mc:Choice xmlns:a14="http://schemas.microsoft.com/office/drawing/2010/main" Requires="a14">
+      <mc:AlternateContent xmlns:mc="http://schemas.openxmlformats.org/markup-compatibility/2006" xmlns:a14="http://schemas.microsoft.com/office/drawing/2010/main">
+        <mc:Choice Requires="a14">
           <p:sp>
             <p:nvSpPr>
               <p:cNvPr id="16" name="Rectangle 15">
@@ -9100,7 +9102,7 @@
             </p:txBody>
           </p:sp>
         </mc:Choice>
-        <mc:Fallback>
+        <mc:Fallback xmlns="">
           <p:sp>
             <p:nvSpPr>
               <p:cNvPr id="16" name="Rectangle 15">
@@ -9145,8 +9147,8 @@
           </p:sp>
         </mc:Fallback>
       </mc:AlternateContent>
-      <mc:AlternateContent xmlns:mc="http://schemas.openxmlformats.org/markup-compatibility/2006">
-        <mc:Choice xmlns:a14="http://schemas.microsoft.com/office/drawing/2010/main" Requires="a14">
+      <mc:AlternateContent xmlns:mc="http://schemas.openxmlformats.org/markup-compatibility/2006" xmlns:a14="http://schemas.microsoft.com/office/drawing/2010/main">
+        <mc:Choice Requires="a14">
           <p:sp>
             <p:nvSpPr>
               <p:cNvPr id="17" name="Rectangle 16">
@@ -9270,7 +9272,7 @@
             </p:txBody>
           </p:sp>
         </mc:Choice>
-        <mc:Fallback>
+        <mc:Fallback xmlns="">
           <p:sp>
             <p:nvSpPr>
               <p:cNvPr id="17" name="Rectangle 16">
@@ -9315,8 +9317,8 @@
           </p:sp>
         </mc:Fallback>
       </mc:AlternateContent>
-      <mc:AlternateContent xmlns:mc="http://schemas.openxmlformats.org/markup-compatibility/2006">
-        <mc:Choice xmlns:a14="http://schemas.microsoft.com/office/drawing/2010/main" Requires="a14">
+      <mc:AlternateContent xmlns:mc="http://schemas.openxmlformats.org/markup-compatibility/2006" xmlns:a14="http://schemas.microsoft.com/office/drawing/2010/main">
+        <mc:Choice Requires="a14">
           <p:sp>
             <p:nvSpPr>
               <p:cNvPr id="18" name="Rectangle 17">
@@ -9440,7 +9442,7 @@
             </p:txBody>
           </p:sp>
         </mc:Choice>
-        <mc:Fallback>
+        <mc:Fallback xmlns="">
           <p:sp>
             <p:nvSpPr>
               <p:cNvPr id="18" name="Rectangle 17">
@@ -10080,8 +10082,8 @@
           </a:p>
         </p:txBody>
       </p:sp>
-      <mc:AlternateContent xmlns:mc="http://schemas.openxmlformats.org/markup-compatibility/2006">
-        <mc:Choice xmlns:a14="http://schemas.microsoft.com/office/drawing/2010/main" Requires="a14">
+      <mc:AlternateContent xmlns:mc="http://schemas.openxmlformats.org/markup-compatibility/2006" xmlns:a14="http://schemas.microsoft.com/office/drawing/2010/main">
+        <mc:Choice Requires="a14">
           <p:sp>
             <p:nvSpPr>
               <p:cNvPr id="32" name="Rectangle 31">
@@ -10205,7 +10207,7 @@
             </p:txBody>
           </p:sp>
         </mc:Choice>
-        <mc:Fallback>
+        <mc:Fallback xmlns="">
           <p:sp>
             <p:nvSpPr>
               <p:cNvPr id="32" name="Rectangle 31">
@@ -10250,8 +10252,8 @@
           </p:sp>
         </mc:Fallback>
       </mc:AlternateContent>
-      <mc:AlternateContent xmlns:mc="http://schemas.openxmlformats.org/markup-compatibility/2006">
-        <mc:Choice xmlns:a14="http://schemas.microsoft.com/office/drawing/2010/main" Requires="a14">
+      <mc:AlternateContent xmlns:mc="http://schemas.openxmlformats.org/markup-compatibility/2006" xmlns:a14="http://schemas.microsoft.com/office/drawing/2010/main">
+        <mc:Choice Requires="a14">
           <p:sp>
             <p:nvSpPr>
               <p:cNvPr id="33" name="Rectangle 32">
@@ -10375,7 +10377,7 @@
             </p:txBody>
           </p:sp>
         </mc:Choice>
-        <mc:Fallback>
+        <mc:Fallback xmlns="">
           <p:sp>
             <p:nvSpPr>
               <p:cNvPr id="33" name="Rectangle 32">
@@ -10420,8 +10422,8 @@
           </p:sp>
         </mc:Fallback>
       </mc:AlternateContent>
-      <mc:AlternateContent xmlns:mc="http://schemas.openxmlformats.org/markup-compatibility/2006">
-        <mc:Choice xmlns:a14="http://schemas.microsoft.com/office/drawing/2010/main" Requires="a14">
+      <mc:AlternateContent xmlns:mc="http://schemas.openxmlformats.org/markup-compatibility/2006" xmlns:a14="http://schemas.microsoft.com/office/drawing/2010/main">
+        <mc:Choice Requires="a14">
           <p:sp>
             <p:nvSpPr>
               <p:cNvPr id="34" name="Rectangle 33">
@@ -10545,7 +10547,7 @@
             </p:txBody>
           </p:sp>
         </mc:Choice>
-        <mc:Fallback>
+        <mc:Fallback xmlns="">
           <p:sp>
             <p:nvSpPr>
               <p:cNvPr id="34" name="Rectangle 33">
@@ -10590,8 +10592,8 @@
           </p:sp>
         </mc:Fallback>
       </mc:AlternateContent>
-      <mc:AlternateContent xmlns:mc="http://schemas.openxmlformats.org/markup-compatibility/2006">
-        <mc:Choice xmlns:a14="http://schemas.microsoft.com/office/drawing/2010/main" Requires="a14">
+      <mc:AlternateContent xmlns:mc="http://schemas.openxmlformats.org/markup-compatibility/2006" xmlns:a14="http://schemas.microsoft.com/office/drawing/2010/main">
+        <mc:Choice Requires="a14">
           <p:sp>
             <p:nvSpPr>
               <p:cNvPr id="35" name="Rectangle 34">
@@ -10715,7 +10717,7 @@
             </p:txBody>
           </p:sp>
         </mc:Choice>
-        <mc:Fallback>
+        <mc:Fallback xmlns="">
           <p:sp>
             <p:nvSpPr>
               <p:cNvPr id="35" name="Rectangle 34">
@@ -10760,8 +10762,8 @@
           </p:sp>
         </mc:Fallback>
       </mc:AlternateContent>
-      <mc:AlternateContent xmlns:mc="http://schemas.openxmlformats.org/markup-compatibility/2006">
-        <mc:Choice xmlns:a14="http://schemas.microsoft.com/office/drawing/2010/main" Requires="a14">
+      <mc:AlternateContent xmlns:mc="http://schemas.openxmlformats.org/markup-compatibility/2006" xmlns:a14="http://schemas.microsoft.com/office/drawing/2010/main">
+        <mc:Choice Requires="a14">
           <p:sp>
             <p:nvSpPr>
               <p:cNvPr id="36" name="TextBox 35">
@@ -10868,19 +10870,7 @@
                           </a:solidFill>
                           <a:latin typeface="Cambria Math" panose="02040503050406030204" pitchFamily="18" charset="0"/>
                         </a:rPr>
-                        <m:t>=</m:t>
-                      </m:r>
-                      <m:r>
-                        <a:rPr lang="en-US" b="0" i="1" dirty="0" smtClean="0">
-                          <a:solidFill>
-                            <a:schemeClr val="tx2">
-                              <a:lumMod val="75000"/>
-                              <a:lumOff val="25000"/>
-                            </a:schemeClr>
-                          </a:solidFill>
-                          <a:latin typeface="Cambria Math" panose="02040503050406030204" pitchFamily="18" charset="0"/>
-                        </a:rPr>
-                        <m:t>0.969</m:t>
+                        <m:t>=0.969</m:t>
                       </m:r>
                     </m:oMath>
                   </m:oMathPara>
@@ -10890,7 +10880,7 @@
             </p:txBody>
           </p:sp>
         </mc:Choice>
-        <mc:Fallback>
+        <mc:Fallback xmlns="">
           <p:sp>
             <p:nvSpPr>
               <p:cNvPr id="36" name="TextBox 35">
@@ -10935,8 +10925,8 @@
           </p:sp>
         </mc:Fallback>
       </mc:AlternateContent>
-      <mc:AlternateContent xmlns:mc="http://schemas.openxmlformats.org/markup-compatibility/2006">
-        <mc:Choice xmlns:a14="http://schemas.microsoft.com/office/drawing/2010/main" Requires="a14">
+      <mc:AlternateContent xmlns:mc="http://schemas.openxmlformats.org/markup-compatibility/2006" xmlns:a14="http://schemas.microsoft.com/office/drawing/2010/main">
+        <mc:Choice Requires="a14">
           <p:sp>
             <p:nvSpPr>
               <p:cNvPr id="37" name="TextBox 36">
@@ -11043,19 +11033,7 @@
                           </a:solidFill>
                           <a:latin typeface="Cambria Math" panose="02040503050406030204" pitchFamily="18" charset="0"/>
                         </a:rPr>
-                        <m:t>=0.</m:t>
-                      </m:r>
-                      <m:r>
-                        <a:rPr lang="en-US" b="0" i="1" dirty="0" smtClean="0">
-                          <a:solidFill>
-                            <a:schemeClr val="tx2">
-                              <a:lumMod val="75000"/>
-                              <a:lumOff val="25000"/>
-                            </a:schemeClr>
-                          </a:solidFill>
-                          <a:latin typeface="Cambria Math" panose="02040503050406030204" pitchFamily="18" charset="0"/>
-                        </a:rPr>
-                        <m:t>970</m:t>
+                        <m:t>=0.970</m:t>
                       </m:r>
                     </m:oMath>
                   </m:oMathPara>
@@ -11065,7 +11043,7 @@
             </p:txBody>
           </p:sp>
         </mc:Choice>
-        <mc:Fallback>
+        <mc:Fallback xmlns="">
           <p:sp>
             <p:nvSpPr>
               <p:cNvPr id="37" name="TextBox 36">
@@ -11110,8 +11088,8 @@
           </p:sp>
         </mc:Fallback>
       </mc:AlternateContent>
-      <mc:AlternateContent xmlns:mc="http://schemas.openxmlformats.org/markup-compatibility/2006">
-        <mc:Choice xmlns:a14="http://schemas.microsoft.com/office/drawing/2010/main" Requires="a14">
+      <mc:AlternateContent xmlns:mc="http://schemas.openxmlformats.org/markup-compatibility/2006" xmlns:a14="http://schemas.microsoft.com/office/drawing/2010/main">
+        <mc:Choice Requires="a14">
           <p:sp>
             <p:nvSpPr>
               <p:cNvPr id="38" name="TextBox 37">
@@ -11218,19 +11196,7 @@
                           </a:solidFill>
                           <a:latin typeface="Cambria Math" panose="02040503050406030204" pitchFamily="18" charset="0"/>
                         </a:rPr>
-                        <m:t>=0.94</m:t>
-                      </m:r>
-                      <m:r>
-                        <a:rPr lang="en-US" b="0" i="1" dirty="0" smtClean="0">
-                          <a:solidFill>
-                            <a:schemeClr val="tx2">
-                              <a:lumMod val="75000"/>
-                              <a:lumOff val="25000"/>
-                            </a:schemeClr>
-                          </a:solidFill>
-                          <a:latin typeface="Cambria Math" panose="02040503050406030204" pitchFamily="18" charset="0"/>
-                        </a:rPr>
-                        <m:t>9</m:t>
+                        <m:t>=0.949</m:t>
                       </m:r>
                     </m:oMath>
                   </m:oMathPara>
@@ -11240,7 +11206,7 @@
             </p:txBody>
           </p:sp>
         </mc:Choice>
-        <mc:Fallback>
+        <mc:Fallback xmlns="">
           <p:sp>
             <p:nvSpPr>
               <p:cNvPr id="38" name="TextBox 37">
@@ -11285,8 +11251,8 @@
           </p:sp>
         </mc:Fallback>
       </mc:AlternateContent>
-      <mc:AlternateContent xmlns:mc="http://schemas.openxmlformats.org/markup-compatibility/2006">
-        <mc:Choice xmlns:a14="http://schemas.microsoft.com/office/drawing/2010/main" Requires="a14">
+      <mc:AlternateContent xmlns:mc="http://schemas.openxmlformats.org/markup-compatibility/2006" xmlns:a14="http://schemas.microsoft.com/office/drawing/2010/main">
+        <mc:Choice Requires="a14">
           <p:sp>
             <p:nvSpPr>
               <p:cNvPr id="39" name="TextBox 38">
@@ -11406,7 +11372,7 @@
             </p:txBody>
           </p:sp>
         </mc:Choice>
-        <mc:Fallback>
+        <mc:Fallback xmlns="">
           <p:sp>
             <p:nvSpPr>
               <p:cNvPr id="39" name="TextBox 38">
